--- a/examples/out.pptx
+++ b/examples/out.pptx
@@ -4863,7 +4863,7 @@
                     <a:p>
                       <a:pPr algn="l"/>
                       <a:r>
-                        <a:rPr sz="1200" b="1">
+                        <a:rPr sz="1400" b="1">
                           <a:solidFill>
                             <a:srgbClr val="FFFFFF"/>
                           </a:solidFill>
@@ -4886,7 +4886,7 @@
                     <a:p>
                       <a:pPr algn="l"/>
                       <a:r>
-                        <a:rPr sz="1200" b="1">
+                        <a:rPr sz="1400" b="1">
                           <a:solidFill>
                             <a:srgbClr val="FFFFFF"/>
                           </a:solidFill>
@@ -4909,7 +4909,7 @@
                     <a:p>
                       <a:pPr algn="l"/>
                       <a:r>
-                        <a:rPr sz="1200" b="1">
+                        <a:rPr sz="1400" b="1">
                           <a:solidFill>
                             <a:srgbClr val="FFFFFF"/>
                           </a:solidFill>
@@ -4932,7 +4932,7 @@
                     <a:p>
                       <a:pPr algn="l"/>
                       <a:r>
-                        <a:rPr sz="1200" b="1">
+                        <a:rPr sz="1400" b="1">
                           <a:solidFill>
                             <a:srgbClr val="FFFFFF"/>
                           </a:solidFill>
@@ -4957,7 +4957,7 @@
                     <a:p>
                       <a:pPr algn="l"/>
                       <a:r>
-                        <a:rPr sz="1100" b="0">
+                        <a:rPr sz="1200" b="0">
                           <a:solidFill>
                             <a:srgbClr val="000000"/>
                           </a:solidFill>
@@ -4968,9 +4968,7 @@
                     </a:p>
                   </a:txBody>
                   <a:tcPr>
-                    <a:solidFill>
-                      <a:srgbClr val="FFFFFF"/>
-                    </a:solidFill>
+                    <a:noFill/>
                   </a:tcPr>
                 </a:tc>
                 <a:tc>
@@ -4980,7 +4978,7 @@
                     <a:p>
                       <a:pPr algn="l"/>
                       <a:r>
-                        <a:rPr sz="1100" b="0">
+                        <a:rPr sz="1200" b="0">
                           <a:solidFill>
                             <a:srgbClr val="000000"/>
                           </a:solidFill>
@@ -4991,9 +4989,7 @@
                     </a:p>
                   </a:txBody>
                   <a:tcPr>
-                    <a:solidFill>
-                      <a:srgbClr val="FFFFFF"/>
-                    </a:solidFill>
+                    <a:noFill/>
                   </a:tcPr>
                 </a:tc>
                 <a:tc>
@@ -5003,7 +4999,7 @@
                     <a:p>
                       <a:pPr algn="l"/>
                       <a:r>
-                        <a:rPr sz="1100" b="0">
+                        <a:rPr sz="1200" b="0">
                           <a:solidFill>
                             <a:srgbClr val="000000"/>
                           </a:solidFill>
@@ -5014,9 +5010,7 @@
                     </a:p>
                   </a:txBody>
                   <a:tcPr>
-                    <a:solidFill>
-                      <a:srgbClr val="FFFFFF"/>
-                    </a:solidFill>
+                    <a:noFill/>
                   </a:tcPr>
                 </a:tc>
                 <a:tc>
@@ -5026,7 +5020,7 @@
                     <a:p>
                       <a:pPr algn="l"/>
                       <a:r>
-                        <a:rPr sz="1100" b="0">
+                        <a:rPr sz="1200" b="0">
                           <a:solidFill>
                             <a:srgbClr val="000000"/>
                           </a:solidFill>
@@ -5037,9 +5031,7 @@
                     </a:p>
                   </a:txBody>
                   <a:tcPr>
-                    <a:solidFill>
-                      <a:srgbClr val="FFFFFF"/>
-                    </a:solidFill>
+                    <a:noFill/>
                   </a:tcPr>
                 </a:tc>
               </a:tr>
@@ -5051,7 +5043,7 @@
                     <a:p>
                       <a:pPr algn="l"/>
                       <a:r>
-                        <a:rPr sz="1100" b="0">
+                        <a:rPr sz="1200" b="0">
                           <a:solidFill>
                             <a:srgbClr val="000000"/>
                           </a:solidFill>
@@ -5062,9 +5054,7 @@
                     </a:p>
                   </a:txBody>
                   <a:tcPr>
-                    <a:solidFill>
-                      <a:srgbClr val="F5F7F8"/>
-                    </a:solidFill>
+                    <a:noFill/>
                   </a:tcPr>
                 </a:tc>
                 <a:tc>
@@ -5074,7 +5064,7 @@
                     <a:p>
                       <a:pPr algn="l"/>
                       <a:r>
-                        <a:rPr sz="1100" b="0">
+                        <a:rPr sz="1200" b="0">
                           <a:solidFill>
                             <a:srgbClr val="000000"/>
                           </a:solidFill>
@@ -5085,9 +5075,7 @@
                     </a:p>
                   </a:txBody>
                   <a:tcPr>
-                    <a:solidFill>
-                      <a:srgbClr val="F5F7F8"/>
-                    </a:solidFill>
+                    <a:noFill/>
                   </a:tcPr>
                 </a:tc>
                 <a:tc>
@@ -5097,7 +5085,7 @@
                     <a:p>
                       <a:pPr algn="l"/>
                       <a:r>
-                        <a:rPr sz="1100" b="0">
+                        <a:rPr sz="1200" b="0">
                           <a:solidFill>
                             <a:srgbClr val="000000"/>
                           </a:solidFill>
@@ -5108,9 +5096,7 @@
                     </a:p>
                   </a:txBody>
                   <a:tcPr>
-                    <a:solidFill>
-                      <a:srgbClr val="F5F7F8"/>
-                    </a:solidFill>
+                    <a:noFill/>
                   </a:tcPr>
                 </a:tc>
                 <a:tc>
@@ -5120,7 +5106,7 @@
                     <a:p>
                       <a:pPr algn="l"/>
                       <a:r>
-                        <a:rPr sz="1100" b="0">
+                        <a:rPr sz="1200" b="0">
                           <a:solidFill>
                             <a:srgbClr val="000000"/>
                           </a:solidFill>
@@ -5131,9 +5117,7 @@
                     </a:p>
                   </a:txBody>
                   <a:tcPr>
-                    <a:solidFill>
-                      <a:srgbClr val="F5F7F8"/>
-                    </a:solidFill>
+                    <a:noFill/>
                   </a:tcPr>
                 </a:tc>
               </a:tr>
@@ -5145,7 +5129,7 @@
                     <a:p>
                       <a:pPr algn="l"/>
                       <a:r>
-                        <a:rPr sz="1100" b="0">
+                        <a:rPr sz="1200" b="0">
                           <a:solidFill>
                             <a:srgbClr val="000000"/>
                           </a:solidFill>
@@ -5156,9 +5140,7 @@
                     </a:p>
                   </a:txBody>
                   <a:tcPr>
-                    <a:solidFill>
-                      <a:srgbClr val="FFFFFF"/>
-                    </a:solidFill>
+                    <a:noFill/>
                   </a:tcPr>
                 </a:tc>
                 <a:tc>
@@ -5168,7 +5150,7 @@
                     <a:p>
                       <a:pPr algn="l"/>
                       <a:r>
-                        <a:rPr sz="1100" b="0">
+                        <a:rPr sz="1200" b="0">
                           <a:solidFill>
                             <a:srgbClr val="000000"/>
                           </a:solidFill>
@@ -5179,9 +5161,7 @@
                     </a:p>
                   </a:txBody>
                   <a:tcPr>
-                    <a:solidFill>
-                      <a:srgbClr val="FFFFFF"/>
-                    </a:solidFill>
+                    <a:noFill/>
                   </a:tcPr>
                 </a:tc>
                 <a:tc>
@@ -5191,7 +5171,7 @@
                     <a:p>
                       <a:pPr algn="l"/>
                       <a:r>
-                        <a:rPr sz="1100" b="0">
+                        <a:rPr sz="1200" b="0">
                           <a:solidFill>
                             <a:srgbClr val="000000"/>
                           </a:solidFill>
@@ -5202,9 +5182,7 @@
                     </a:p>
                   </a:txBody>
                   <a:tcPr>
-                    <a:solidFill>
-                      <a:srgbClr val="FFFFFF"/>
-                    </a:solidFill>
+                    <a:noFill/>
                   </a:tcPr>
                 </a:tc>
                 <a:tc>
@@ -5214,7 +5192,7 @@
                     <a:p>
                       <a:pPr algn="l"/>
                       <a:r>
-                        <a:rPr sz="1100" b="0">
+                        <a:rPr sz="1200" b="0">
                           <a:solidFill>
                             <a:srgbClr val="000000"/>
                           </a:solidFill>
@@ -5225,9 +5203,7 @@
                     </a:p>
                   </a:txBody>
                   <a:tcPr>
-                    <a:solidFill>
-                      <a:srgbClr val="FFFFFF"/>
-                    </a:solidFill>
+                    <a:noFill/>
                   </a:tcPr>
                 </a:tc>
               </a:tr>
@@ -5239,7 +5215,7 @@
                     <a:p>
                       <a:pPr algn="l"/>
                       <a:r>
-                        <a:rPr sz="1100" b="0">
+                        <a:rPr sz="1200" b="0">
                           <a:solidFill>
                             <a:srgbClr val="000000"/>
                           </a:solidFill>
@@ -5250,9 +5226,7 @@
                     </a:p>
                   </a:txBody>
                   <a:tcPr>
-                    <a:solidFill>
-                      <a:srgbClr val="F5F7F8"/>
-                    </a:solidFill>
+                    <a:noFill/>
                   </a:tcPr>
                 </a:tc>
                 <a:tc>
@@ -5262,7 +5236,7 @@
                     <a:p>
                       <a:pPr algn="l"/>
                       <a:r>
-                        <a:rPr sz="1100" b="0">
+                        <a:rPr sz="1200" b="0">
                           <a:solidFill>
                             <a:srgbClr val="000000"/>
                           </a:solidFill>
@@ -5273,9 +5247,7 @@
                     </a:p>
                   </a:txBody>
                   <a:tcPr>
-                    <a:solidFill>
-                      <a:srgbClr val="F5F7F8"/>
-                    </a:solidFill>
+                    <a:noFill/>
                   </a:tcPr>
                 </a:tc>
                 <a:tc>
@@ -5285,7 +5257,7 @@
                     <a:p>
                       <a:pPr algn="l"/>
                       <a:r>
-                        <a:rPr sz="1100" b="0">
+                        <a:rPr sz="1200" b="0">
                           <a:solidFill>
                             <a:srgbClr val="000000"/>
                           </a:solidFill>
@@ -5296,9 +5268,7 @@
                     </a:p>
                   </a:txBody>
                   <a:tcPr>
-                    <a:solidFill>
-                      <a:srgbClr val="F5F7F8"/>
-                    </a:solidFill>
+                    <a:noFill/>
                   </a:tcPr>
                 </a:tc>
                 <a:tc>
@@ -5308,7 +5278,7 @@
                     <a:p>
                       <a:pPr algn="l"/>
                       <a:r>
-                        <a:rPr sz="1100" b="0">
+                        <a:rPr sz="1200" b="0">
                           <a:solidFill>
                             <a:srgbClr val="000000"/>
                           </a:solidFill>
@@ -5319,9 +5289,7 @@
                     </a:p>
                   </a:txBody>
                   <a:tcPr>
-                    <a:solidFill>
-                      <a:srgbClr val="F5F7F8"/>
-                    </a:solidFill>
+                    <a:noFill/>
                   </a:tcPr>
                 </a:tc>
               </a:tr>

--- a/examples/out.pptx
+++ b/examples/out.pptx
@@ -3608,7 +3608,7 @@
         </p:nvSpPr>
         <p:spPr>
           <a:xfrm>
-            <a:off x="8909315" y="1959428"/>
+            <a:off x="7971493" y="1959428"/>
             <a:ext cx="2813468" cy="2939142"/>
           </a:xfrm>
           <a:prstGeom prst="rect">
@@ -3978,7 +3978,7 @@
         </p:nvSpPr>
         <p:spPr>
           <a:xfrm>
-            <a:off x="8909315" y="1959428"/>
+            <a:off x="7971493" y="1959428"/>
             <a:ext cx="2813468" cy="2939142"/>
           </a:xfrm>
           <a:prstGeom prst="rect">

--- a/examples/out.pptx
+++ b/examples/out.pptx
@@ -3608,8 +3608,8 @@
         </p:nvSpPr>
         <p:spPr>
           <a:xfrm>
-            <a:off x="7971493" y="1959428"/>
-            <a:ext cx="2813468" cy="2939142"/>
+            <a:off x="7971493" y="1469571"/>
+            <a:ext cx="2813468" cy="3429000"/>
           </a:xfrm>
           <a:prstGeom prst="rect">
             <a:avLst/>
@@ -3617,7 +3617,7 @@
           <a:noFill/>
         </p:spPr>
         <p:txBody>
-          <a:bodyPr wrap="square" anchor="ctr" lIns="0" rIns="0" tIns="0" bIns="0">
+          <a:bodyPr wrap="none" anchor="ctr" lIns="0" rIns="0" tIns="0" bIns="0">
             <a:spAutoFit/>
           </a:bodyPr>
           <a:lstStyle/>
@@ -3643,8 +3643,8 @@
         </p:nvSpPr>
         <p:spPr>
           <a:xfrm>
-            <a:off x="468911" y="4898571"/>
-            <a:ext cx="7502581" cy="1469571"/>
+            <a:off x="468911" y="5388428"/>
+            <a:ext cx="7502581" cy="979714"/>
           </a:xfrm>
           <a:prstGeom prst="rect">
             <a:avLst/>
@@ -3978,8 +3978,8 @@
         </p:nvSpPr>
         <p:spPr>
           <a:xfrm>
-            <a:off x="7971493" y="1959428"/>
-            <a:ext cx="2813468" cy="2939142"/>
+            <a:off x="7971493" y="1469571"/>
+            <a:ext cx="2813468" cy="3429000"/>
           </a:xfrm>
           <a:prstGeom prst="rect">
             <a:avLst/>
@@ -3987,7 +3987,7 @@
           <a:noFill/>
         </p:spPr>
         <p:txBody>
-          <a:bodyPr wrap="square" anchor="ctr" lIns="0" rIns="0" tIns="0" bIns="0">
+          <a:bodyPr wrap="none" anchor="ctr" lIns="0" rIns="0" tIns="0" bIns="0">
             <a:spAutoFit/>
           </a:bodyPr>
           <a:lstStyle/>
@@ -4013,8 +4013,8 @@
         </p:nvSpPr>
         <p:spPr>
           <a:xfrm>
-            <a:off x="468911" y="4898571"/>
-            <a:ext cx="7502581" cy="1469571"/>
+            <a:off x="468911" y="5388428"/>
+            <a:ext cx="7502581" cy="979714"/>
           </a:xfrm>
           <a:prstGeom prst="rect">
             <a:avLst/>

--- a/examples/out.pptx
+++ b/examples/out.pptx
@@ -3302,13 +3302,13 @@
         </p:spPr>
         <p:txBody>
           <a:bodyPr wrap="square" anchor="t" lIns="0" rIns="0" tIns="0" bIns="0">
-            <a:spAutoFit/>
+            <a:noAutofit/>
           </a:bodyPr>
           <a:lstStyle/>
           <a:p>
             <a:pPr algn="ctr"/>
             <a:r>
-              <a:rPr sz="3600" b="1">
+              <a:rPr sz="4800" b="1">
                 <a:solidFill>
                   <a:srgbClr val="000000"/>
                 </a:solidFill>
@@ -3337,7 +3337,7 @@
         </p:spPr>
         <p:txBody>
           <a:bodyPr wrap="square" anchor="t" lIns="0" rIns="0" tIns="0" bIns="0">
-            <a:spAutoFit/>
+            <a:noAutofit/>
           </a:bodyPr>
           <a:lstStyle/>
           <a:p>
@@ -3478,13 +3478,13 @@
         </p:spPr>
         <p:txBody>
           <a:bodyPr wrap="square" anchor="t" lIns="0" rIns="0" tIns="0" bIns="0">
-            <a:spAutoFit/>
+            <a:noAutofit/>
           </a:bodyPr>
           <a:lstStyle/>
           <a:p>
             <a:pPr algn="ctr"/>
             <a:r>
-              <a:rPr sz="3600" b="1">
+              <a:rPr sz="4800" b="1">
                 <a:solidFill>
                   <a:srgbClr val="000000"/>
                 </a:solidFill>
@@ -3497,7 +3497,7 @@
       </p:sp>
       <p:sp>
         <p:nvSpPr>
-          <p:cNvPr id="3" name="Rounded Rectangle 2"/>
+          <p:cNvPr id="3" name="Rectangle 2"/>
           <p:cNvSpPr/>
           <p:nvPr/>
         </p:nvSpPr>
@@ -3506,7 +3506,7 @@
             <a:off x="4220202" y="3429000"/>
             <a:ext cx="3751290" cy="979714"/>
           </a:xfrm>
-          <a:prstGeom prst="roundRect">
+          <a:prstGeom prst="rect">
             <a:avLst/>
           </a:prstGeom>
           <a:solidFill>
@@ -3565,7 +3565,7 @@
         </p:spPr>
         <p:txBody>
           <a:bodyPr wrap="square" anchor="t" lIns="0" rIns="0" tIns="0" bIns="0">
-            <a:spAutoFit/>
+            <a:noAutofit/>
           </a:bodyPr>
           <a:lstStyle/>
           <a:p>
@@ -3608,8 +3608,8 @@
         </p:nvSpPr>
         <p:spPr>
           <a:xfrm>
-            <a:off x="7971493" y="1469571"/>
-            <a:ext cx="2813468" cy="3429000"/>
+            <a:off x="7971493" y="979714"/>
+            <a:ext cx="2813468" cy="4408714"/>
           </a:xfrm>
           <a:prstGeom prst="rect">
             <a:avLst/>
@@ -3618,13 +3618,13 @@
         </p:spPr>
         <p:txBody>
           <a:bodyPr wrap="none" anchor="ctr" lIns="0" rIns="0" tIns="0" bIns="0">
-            <a:spAutoFit/>
+            <a:noAutofit/>
           </a:bodyPr>
           <a:lstStyle/>
           <a:p>
             <a:pPr algn="r"/>
             <a:r>
-              <a:rPr sz="24000" b="0">
+              <a:rPr sz="30000" b="0">
                 <a:solidFill>
                   <a:srgbClr val="FE7C39"/>
                 </a:solidFill>
@@ -3653,13 +3653,13 @@
         </p:spPr>
         <p:txBody>
           <a:bodyPr wrap="square" anchor="t" lIns="0" rIns="0" tIns="0" bIns="0">
-            <a:spAutoFit/>
+            <a:noAutofit/>
           </a:bodyPr>
           <a:lstStyle/>
           <a:p>
             <a:pPr algn="l"/>
             <a:r>
-              <a:rPr sz="3600" b="1">
+              <a:rPr sz="4800" b="1">
                 <a:solidFill>
                   <a:srgbClr val="000000"/>
                 </a:solidFill>
@@ -3706,13 +3706,13 @@
         </p:spPr>
         <p:txBody>
           <a:bodyPr wrap="square" anchor="t" lIns="0" rIns="0" tIns="0" bIns="0">
-            <a:spAutoFit/>
+            <a:noAutofit/>
           </a:bodyPr>
           <a:lstStyle/>
           <a:p>
             <a:pPr algn="l"/>
             <a:r>
-              <a:rPr sz="3600" b="1">
+              <a:rPr sz="4800" b="1">
                 <a:solidFill>
                   <a:srgbClr val="000000"/>
                 </a:solidFill>
@@ -3741,7 +3741,7 @@
         </p:spPr>
         <p:txBody>
           <a:bodyPr wrap="square" anchor="t" lIns="0" rIns="0" tIns="0" bIns="0">
-            <a:spAutoFit/>
+            <a:noAutofit/>
           </a:bodyPr>
           <a:lstStyle/>
           <a:p>
@@ -3751,7 +3751,7 @@
               </a:spcAft>
             </a:pPr>
             <a:r>
-              <a:rPr sz="1400" b="0">
+              <a:rPr sz="1500" b="0">
                 <a:solidFill>
                   <a:srgbClr val="000000"/>
                 </a:solidFill>
@@ -3767,7 +3767,7 @@
               </a:spcAft>
             </a:pPr>
             <a:r>
-              <a:rPr sz="1400" b="0">
+              <a:rPr sz="1500" b="0">
                 <a:solidFill>
                   <a:srgbClr val="000000"/>
                 </a:solidFill>
@@ -3783,7 +3783,7 @@
               </a:spcAft>
             </a:pPr>
             <a:r>
-              <a:rPr sz="1400" b="0">
+              <a:rPr sz="1500" b="0">
                 <a:solidFill>
                   <a:srgbClr val="000000"/>
                 </a:solidFill>
@@ -3799,7 +3799,7 @@
               </a:spcAft>
             </a:pPr>
             <a:r>
-              <a:rPr sz="1400" b="0">
+              <a:rPr sz="1500" b="0">
                 <a:solidFill>
                   <a:srgbClr val="000000"/>
                 </a:solidFill>
@@ -3846,13 +3846,13 @@
         </p:spPr>
         <p:txBody>
           <a:bodyPr wrap="square" anchor="t" lIns="0" rIns="0" tIns="0" bIns="0">
-            <a:spAutoFit/>
+            <a:noAutofit/>
           </a:bodyPr>
           <a:lstStyle/>
           <a:p>
             <a:pPr algn="l"/>
             <a:r>
-              <a:rPr sz="3600" b="1">
+              <a:rPr sz="4800" b="1">
                 <a:solidFill>
                   <a:srgbClr val="000000"/>
                 </a:solidFill>
@@ -3899,7 +3899,7 @@
         </p:spPr>
         <p:txBody>
           <a:bodyPr wrap="square" anchor="t" lIns="0" rIns="0" tIns="0" bIns="0">
-            <a:spAutoFit/>
+            <a:noAutofit/>
           </a:bodyPr>
           <a:lstStyle/>
           <a:p>
@@ -3909,7 +3909,7 @@
               </a:spcAft>
             </a:pPr>
             <a:r>
-              <a:rPr sz="1400" b="0">
+              <a:rPr sz="1500" b="0">
                 <a:solidFill>
                   <a:srgbClr val="000000"/>
                 </a:solidFill>
@@ -3925,7 +3925,7 @@
               </a:spcAft>
             </a:pPr>
             <a:r>
-              <a:rPr sz="1400" b="0">
+              <a:rPr sz="1500" b="0">
                 <a:solidFill>
                   <a:srgbClr val="000000"/>
                 </a:solidFill>
@@ -3941,7 +3941,7 @@
               </a:spcAft>
             </a:pPr>
             <a:r>
-              <a:rPr sz="1400" b="0">
+              <a:rPr sz="1500" b="0">
                 <a:solidFill>
                   <a:srgbClr val="000000"/>
                 </a:solidFill>
@@ -3978,8 +3978,8 @@
         </p:nvSpPr>
         <p:spPr>
           <a:xfrm>
-            <a:off x="7971493" y="1469571"/>
-            <a:ext cx="2813468" cy="3429000"/>
+            <a:off x="7971493" y="979714"/>
+            <a:ext cx="2813468" cy="4408714"/>
           </a:xfrm>
           <a:prstGeom prst="rect">
             <a:avLst/>
@@ -3988,13 +3988,13 @@
         </p:spPr>
         <p:txBody>
           <a:bodyPr wrap="none" anchor="ctr" lIns="0" rIns="0" tIns="0" bIns="0">
-            <a:spAutoFit/>
+            <a:noAutofit/>
           </a:bodyPr>
           <a:lstStyle/>
           <a:p>
             <a:pPr algn="r"/>
             <a:r>
-              <a:rPr sz="24000" b="0">
+              <a:rPr sz="30000" b="0">
                 <a:solidFill>
                   <a:srgbClr val="FE7C39"/>
                 </a:solidFill>
@@ -4023,13 +4023,13 @@
         </p:spPr>
         <p:txBody>
           <a:bodyPr wrap="square" anchor="t" lIns="0" rIns="0" tIns="0" bIns="0">
-            <a:spAutoFit/>
+            <a:noAutofit/>
           </a:bodyPr>
           <a:lstStyle/>
           <a:p>
             <a:pPr algn="l"/>
             <a:r>
-              <a:rPr sz="3600" b="1">
+              <a:rPr sz="4800" b="1">
                 <a:solidFill>
                   <a:srgbClr val="000000"/>
                 </a:solidFill>
@@ -4076,13 +4076,13 @@
         </p:spPr>
         <p:txBody>
           <a:bodyPr wrap="square" anchor="t" lIns="0" rIns="0" tIns="0" bIns="0">
-            <a:spAutoFit/>
+            <a:noAutofit/>
           </a:bodyPr>
           <a:lstStyle/>
           <a:p>
             <a:pPr algn="l"/>
             <a:r>
-              <a:rPr sz="3600" b="1">
+              <a:rPr sz="4800" b="1">
                 <a:solidFill>
                   <a:srgbClr val="000000"/>
                 </a:solidFill>
@@ -4549,13 +4549,13 @@
         </p:spPr>
         <p:txBody>
           <a:bodyPr wrap="square" anchor="t" lIns="0" rIns="0" tIns="0" bIns="0">
-            <a:spAutoFit/>
+            <a:noAutofit/>
           </a:bodyPr>
           <a:lstStyle/>
           <a:p>
             <a:pPr algn="l"/>
             <a:r>
-              <a:rPr sz="3600" b="1">
+              <a:rPr sz="4800" b="1">
                 <a:solidFill>
                   <a:srgbClr val="000000"/>
                 </a:solidFill>
@@ -4584,13 +4584,13 @@
         </p:spPr>
         <p:txBody>
           <a:bodyPr wrap="square" anchor="t" lIns="0" rIns="0" tIns="0" bIns="0">
-            <a:spAutoFit/>
+            <a:noAutofit/>
           </a:bodyPr>
           <a:lstStyle/>
           <a:p>
             <a:pPr algn="l"/>
             <a:r>
-              <a:rPr sz="2400" b="1">
+              <a:rPr sz="2800" b="1">
                 <a:solidFill>
                   <a:srgbClr val="FD5108"/>
                 </a:solidFill>
@@ -4619,13 +4619,13 @@
         </p:spPr>
         <p:txBody>
           <a:bodyPr wrap="square" anchor="t" lIns="0" rIns="0" tIns="0" bIns="0">
-            <a:spAutoFit/>
+            <a:noAutofit/>
           </a:bodyPr>
           <a:lstStyle/>
           <a:p>
             <a:pPr algn="l"/>
             <a:r>
-              <a:rPr sz="2400" b="1">
+              <a:rPr sz="2800" b="1">
                 <a:solidFill>
                   <a:srgbClr val="FD5108"/>
                 </a:solidFill>
@@ -4654,7 +4654,7 @@
         </p:spPr>
         <p:txBody>
           <a:bodyPr wrap="square" anchor="t" lIns="0" rIns="0" tIns="0" bIns="0">
-            <a:spAutoFit/>
+            <a:noAutofit/>
           </a:bodyPr>
           <a:lstStyle/>
           <a:p>
@@ -4664,7 +4664,7 @@
               </a:spcAft>
             </a:pPr>
             <a:r>
-              <a:rPr sz="1400" b="0">
+              <a:rPr sz="1500" b="0">
                 <a:solidFill>
                   <a:srgbClr val="000000"/>
                 </a:solidFill>
@@ -4680,7 +4680,7 @@
               </a:spcAft>
             </a:pPr>
             <a:r>
-              <a:rPr sz="1400" b="0">
+              <a:rPr sz="1500" b="0">
                 <a:solidFill>
                   <a:srgbClr val="000000"/>
                 </a:solidFill>
@@ -4696,7 +4696,7 @@
               </a:spcAft>
             </a:pPr>
             <a:r>
-              <a:rPr sz="1400" b="0">
+              <a:rPr sz="1500" b="0">
                 <a:solidFill>
                   <a:srgbClr val="000000"/>
                 </a:solidFill>
@@ -4725,7 +4725,7 @@
         </p:spPr>
         <p:txBody>
           <a:bodyPr wrap="square" anchor="t" lIns="0" rIns="0" tIns="0" bIns="0">
-            <a:spAutoFit/>
+            <a:noAutofit/>
           </a:bodyPr>
           <a:lstStyle/>
           <a:p>
@@ -4735,7 +4735,7 @@
               </a:spcAft>
             </a:pPr>
             <a:r>
-              <a:rPr sz="1400" b="0">
+              <a:rPr sz="1500" b="0">
                 <a:solidFill>
                   <a:srgbClr val="000000"/>
                 </a:solidFill>
@@ -4751,7 +4751,7 @@
               </a:spcAft>
             </a:pPr>
             <a:r>
-              <a:rPr sz="1400" b="0">
+              <a:rPr sz="1500" b="0">
                 <a:solidFill>
                   <a:srgbClr val="000000"/>
                 </a:solidFill>
@@ -4767,7 +4767,7 @@
               </a:spcAft>
             </a:pPr>
             <a:r>
-              <a:rPr sz="1400" b="0">
+              <a:rPr sz="1500" b="0">
                 <a:solidFill>
                   <a:srgbClr val="000000"/>
                 </a:solidFill>
@@ -4814,13 +4814,13 @@
         </p:spPr>
         <p:txBody>
           <a:bodyPr wrap="square" anchor="t" lIns="0" rIns="0" tIns="0" bIns="0">
-            <a:spAutoFit/>
+            <a:noAutofit/>
           </a:bodyPr>
           <a:lstStyle/>
           <a:p>
             <a:pPr algn="l"/>
             <a:r>
-              <a:rPr sz="3600" b="1">
+              <a:rPr sz="4800" b="1">
                 <a:solidFill>
                   <a:srgbClr val="000000"/>
                 </a:solidFill>
@@ -5333,13 +5333,13 @@
         </p:spPr>
         <p:txBody>
           <a:bodyPr wrap="square" anchor="t" lIns="0" rIns="0" tIns="0" bIns="0">
-            <a:spAutoFit/>
+            <a:noAutofit/>
           </a:bodyPr>
           <a:lstStyle/>
           <a:p>
             <a:pPr algn="l"/>
             <a:r>
-              <a:rPr sz="3600" b="1">
+              <a:rPr sz="4800" b="1">
                 <a:solidFill>
                   <a:srgbClr val="000000"/>
                 </a:solidFill>
@@ -5449,13 +5449,13 @@
         </p:spPr>
         <p:txBody>
           <a:bodyPr wrap="square" anchor="t" lIns="0" rIns="0" tIns="0" bIns="0">
-            <a:spAutoFit/>
+            <a:noAutofit/>
           </a:bodyPr>
           <a:lstStyle/>
           <a:p>
             <a:pPr algn="l"/>
             <a:r>
-              <a:rPr sz="1400" b="0">
+              <a:rPr sz="1500" b="0">
                 <a:solidFill>
                   <a:srgbClr val="000000"/>
                 </a:solidFill>
@@ -5565,13 +5565,13 @@
         </p:spPr>
         <p:txBody>
           <a:bodyPr wrap="square" anchor="t" lIns="0" rIns="0" tIns="0" bIns="0">
-            <a:spAutoFit/>
+            <a:noAutofit/>
           </a:bodyPr>
           <a:lstStyle/>
           <a:p>
             <a:pPr algn="l"/>
             <a:r>
-              <a:rPr sz="1400" b="0">
+              <a:rPr sz="1500" b="0">
                 <a:solidFill>
                   <a:srgbClr val="000000"/>
                 </a:solidFill>
@@ -5681,13 +5681,13 @@
         </p:spPr>
         <p:txBody>
           <a:bodyPr wrap="square" anchor="t" lIns="0" rIns="0" tIns="0" bIns="0">
-            <a:spAutoFit/>
+            <a:noAutofit/>
           </a:bodyPr>
           <a:lstStyle/>
           <a:p>
             <a:pPr algn="l"/>
             <a:r>
-              <a:rPr sz="1400" b="0">
+              <a:rPr sz="1500" b="0">
                 <a:solidFill>
                   <a:srgbClr val="000000"/>
                 </a:solidFill>
